--- a/[과제] 애니메이션 리스트.pptx
+++ b/[과제] 애니메이션 리스트.pptx
@@ -5659,7 +5659,7 @@
         </p:nvGraphicFramePr>
         <p:xfrm>
           <a:off x="616347" y="1125975"/>
-          <a:ext cx="10994465" cy="5478498"/>
+          <a:ext cx="10994465" cy="5508978"/>
         </p:xfrm>
         <a:graphic>
           <a:graphicData uri="http://schemas.openxmlformats.org/drawingml/2006/table">
@@ -12251,7 +12251,7 @@
         </p:nvCxnSpPr>
         <p:spPr>
           <a:xfrm>
-            <a:off x="616347" y="4059417"/>
+            <a:off x="616347" y="4057036"/>
             <a:ext cx="10994464" cy="0"/>
           </a:xfrm>
           <a:prstGeom prst="line">
